--- a/T01_varifiction_uart_stopwatch/8-1조_이준형_장현동_UART_FIFO_WATCH_STOPWATCH_발표.pptx
+++ b/T01_varifiction_uart_stopwatch/8-1조_이준형_장현동_UART_FIFO_WATCH_STOPWATCH_발표.pptx
@@ -76,8 +76,11 @@
     <p:sldId id="337" r:id="rId70"/>
     <p:sldId id="338" r:id="rId71"/>
     <p:sldId id="339" r:id="rId72"/>
-    <p:sldId id="340" r:id="rId73"/>
-    <p:sldId id="341" r:id="rId74"/>
+    <p:sldId id="344" r:id="rId73"/>
+    <p:sldId id="340" r:id="rId74"/>
+    <p:sldId id="343" r:id="rId75"/>
+    <p:sldId id="345" r:id="rId76"/>
+    <p:sldId id="341" r:id="rId77"/>
   </p:sldIdLst>
   <p:sldSz cx="24384000" cy="13716000"/>
   <p:notesSz cx="6858000" cy="9144000"/>
@@ -20215,7 +20218,7 @@
         <p:spPr>
           <a:xfrm>
             <a:off x="1295400" y="3893820"/>
-            <a:ext cx="15849600" cy="7612380"/>
+            <a:ext cx="15849600" cy="7694414"/>
           </a:xfrm>
           <a:prstGeom prst="rect">
             <a:avLst/>
@@ -20235,7 +20238,7 @@
               <a:defRPr/>
             </a:pPr>
             <a:r>
-              <a:rPr sz="3800" b="0" i="0" strike="noStrike">
+              <a:rPr sz="3800" b="0" i="0" strike="noStrike" dirty="0">
                 <a:solidFill>
                   <a:srgbClr val="000000">
                     <a:alpha val="100000"/>
@@ -20251,7 +20254,7 @@
             <a:pPr lvl="0" algn="l">
               <a:defRPr/>
             </a:pPr>
-            <a:endParaRPr sz="3800" b="0" i="0" strike="noStrike">
+            <a:endParaRPr sz="3800" b="0" i="0" strike="noStrike" dirty="0">
               <a:solidFill>
                 <a:srgbClr val="000000">
                   <a:alpha val="100000"/>
@@ -20266,7 +20269,7 @@
               <a:defRPr/>
             </a:pPr>
             <a:r>
-              <a:rPr sz="3800" b="0" i="0" strike="noStrike">
+              <a:rPr sz="3800" b="0" i="0" strike="noStrike" dirty="0">
                 <a:solidFill>
                   <a:srgbClr val="000000">
                     <a:alpha val="100000"/>
@@ -20275,14 +20278,141 @@
                 <a:latin typeface="맑은 고딕"/>
                 <a:cs typeface="Arial"/>
               </a:rPr>
-              <a:t>본 프로젝트의 목표는 SystemVerilog 기반 Testbench를 구축하여</a:t>
-            </a:r>
-          </a:p>
-          <a:p>
-            <a:pPr lvl="0" algn="l">
-              <a:defRPr/>
-            </a:pPr>
-            <a:endParaRPr sz="3800" b="0" i="0" strike="noStrike">
+              <a:t>본 </a:t>
+            </a:r>
+            <a:r>
+              <a:rPr sz="3800" b="0" i="0" strike="noStrike" dirty="0" err="1">
+                <a:solidFill>
+                  <a:srgbClr val="000000">
+                    <a:alpha val="100000"/>
+                  </a:srgbClr>
+                </a:solidFill>
+                <a:latin typeface="맑은 고딕"/>
+                <a:cs typeface="Arial"/>
+              </a:rPr>
+              <a:t>프로젝트의</a:t>
+            </a:r>
+            <a:r>
+              <a:rPr sz="3800" b="0" i="0" strike="noStrike" dirty="0">
+                <a:solidFill>
+                  <a:srgbClr val="000000">
+                    <a:alpha val="100000"/>
+                  </a:srgbClr>
+                </a:solidFill>
+                <a:latin typeface="맑은 고딕"/>
+                <a:cs typeface="Arial"/>
+              </a:rPr>
+              <a:t> </a:t>
+            </a:r>
+            <a:r>
+              <a:rPr sz="3800" b="0" i="0" strike="noStrike" dirty="0" err="1">
+                <a:solidFill>
+                  <a:srgbClr val="000000">
+                    <a:alpha val="100000"/>
+                  </a:srgbClr>
+                </a:solidFill>
+                <a:latin typeface="맑은 고딕"/>
+                <a:cs typeface="Arial"/>
+              </a:rPr>
+              <a:t>목표는</a:t>
+            </a:r>
+            <a:r>
+              <a:rPr sz="3800" b="0" i="0" strike="noStrike" dirty="0">
+                <a:solidFill>
+                  <a:srgbClr val="000000">
+                    <a:alpha val="100000"/>
+                  </a:srgbClr>
+                </a:solidFill>
+                <a:latin typeface="맑은 고딕"/>
+                <a:cs typeface="Arial"/>
+              </a:rPr>
+              <a:t> </a:t>
+            </a:r>
+            <a:r>
+              <a:rPr sz="3800" b="0" i="0" strike="noStrike" dirty="0" err="1">
+                <a:solidFill>
+                  <a:srgbClr val="000000">
+                    <a:alpha val="100000"/>
+                  </a:srgbClr>
+                </a:solidFill>
+                <a:latin typeface="맑은 고딕"/>
+                <a:cs typeface="Arial"/>
+              </a:rPr>
+              <a:t>SystemVerilog</a:t>
+            </a:r>
+            <a:r>
+              <a:rPr sz="3800" b="0" i="0" strike="noStrike" dirty="0">
+                <a:solidFill>
+                  <a:srgbClr val="000000">
+                    <a:alpha val="100000"/>
+                  </a:srgbClr>
+                </a:solidFill>
+                <a:latin typeface="맑은 고딕"/>
+                <a:cs typeface="Arial"/>
+              </a:rPr>
+              <a:t> </a:t>
+            </a:r>
+            <a:r>
+              <a:rPr sz="3800" b="0" i="0" strike="noStrike" dirty="0" err="1">
+                <a:solidFill>
+                  <a:srgbClr val="000000">
+                    <a:alpha val="100000"/>
+                  </a:srgbClr>
+                </a:solidFill>
+                <a:latin typeface="맑은 고딕"/>
+                <a:cs typeface="Arial"/>
+              </a:rPr>
+              <a:t>기반</a:t>
+            </a:r>
+            <a:r>
+              <a:rPr sz="3800" b="0" i="0" strike="noStrike" dirty="0">
+                <a:solidFill>
+                  <a:srgbClr val="000000">
+                    <a:alpha val="100000"/>
+                  </a:srgbClr>
+                </a:solidFill>
+                <a:latin typeface="맑은 고딕"/>
+                <a:cs typeface="Arial"/>
+              </a:rPr>
+              <a:t> </a:t>
+            </a:r>
+            <a:r>
+              <a:rPr sz="3800" b="0" i="0" strike="noStrike" dirty="0" err="1">
+                <a:solidFill>
+                  <a:srgbClr val="000000">
+                    <a:alpha val="100000"/>
+                  </a:srgbClr>
+                </a:solidFill>
+                <a:latin typeface="맑은 고딕"/>
+                <a:cs typeface="Arial"/>
+              </a:rPr>
+              <a:t>Testbench를</a:t>
+            </a:r>
+            <a:r>
+              <a:rPr sz="3800" b="0" i="0" strike="noStrike" dirty="0">
+                <a:solidFill>
+                  <a:srgbClr val="000000">
+                    <a:alpha val="100000"/>
+                  </a:srgbClr>
+                </a:solidFill>
+                <a:latin typeface="맑은 고딕"/>
+                <a:cs typeface="Arial"/>
+              </a:rPr>
+              <a:t> </a:t>
+            </a:r>
+            <a:r>
+              <a:rPr sz="3800" b="0" i="0" strike="noStrike" dirty="0" err="1">
+                <a:solidFill>
+                  <a:srgbClr val="000000">
+                    <a:alpha val="100000"/>
+                  </a:srgbClr>
+                </a:solidFill>
+                <a:latin typeface="맑은 고딕"/>
+                <a:cs typeface="Arial"/>
+              </a:rPr>
+              <a:t>구축하여</a:t>
+            </a:r>
+            <a:endParaRPr sz="3800" b="0" i="0" strike="noStrike" dirty="0">
               <a:solidFill>
                 <a:srgbClr val="000000">
                   <a:alpha val="100000"/>
@@ -20296,8 +20426,22 @@
             <a:pPr lvl="0" algn="l">
               <a:defRPr/>
             </a:pPr>
-            <a:r>
-              <a:rPr sz="3800" b="0" i="0" strike="noStrike">
+            <a:endParaRPr sz="3800" b="0" i="0" strike="noStrike" dirty="0">
+              <a:solidFill>
+                <a:srgbClr val="000000">
+                  <a:alpha val="100000"/>
+                </a:srgbClr>
+              </a:solidFill>
+              <a:latin typeface="맑은 고딕"/>
+              <a:cs typeface="Arial"/>
+            </a:endParaRPr>
+          </a:p>
+          <a:p>
+            <a:pPr lvl="0">
+              <a:defRPr/>
+            </a:pPr>
+            <a:r>
+              <a:rPr sz="3800" b="0" i="0" strike="noStrike" dirty="0">
                 <a:solidFill>
                   <a:srgbClr val="000000">
                     <a:alpha val="100000"/>
@@ -20306,10 +20450,10 @@
                 <a:latin typeface="맑은 고딕"/>
                 <a:cs typeface="Arial"/>
               </a:rPr>
-              <a:t>UART RX → FIFO UART TX →</a:t>
-            </a:r>
-            <a:r>
-              <a:rPr lang="en-US" altLang="ko-KR" sz="3800" b="0" i="0" strike="noStrike">
+              <a:t>UART RX → </a:t>
+            </a:r>
+            <a:r>
+              <a:rPr sz="3800" b="0" i="0" strike="noStrike" dirty="0" smtClean="0">
                 <a:solidFill>
                   <a:srgbClr val="000000">
                     <a:alpha val="100000"/>
@@ -20318,10 +20462,10 @@
                 <a:latin typeface="맑은 고딕"/>
                 <a:cs typeface="Arial"/>
               </a:rPr>
-              <a:t> FIFO</a:t>
-            </a:r>
-            <a:r>
-              <a:rPr sz="3800" b="0" i="0" strike="noStrike">
+              <a:t>FIFO</a:t>
+            </a:r>
+            <a:r>
+              <a:rPr lang="en-US" sz="3800" dirty="0" smtClean="0">
                 <a:solidFill>
                   <a:srgbClr val="000000">
                     <a:alpha val="100000"/>
@@ -20330,14 +20474,105 @@
                 <a:latin typeface="맑은 고딕"/>
                 <a:cs typeface="Arial"/>
               </a:rPr>
-              <a:t>데이터 흐름 검증</a:t>
-            </a:r>
-          </a:p>
-          <a:p>
-            <a:pPr lvl="0" algn="l">
-              <a:defRPr/>
-            </a:pPr>
-            <a:endParaRPr sz="3800" b="0" i="0" strike="noStrike">
+              <a:t> &amp; </a:t>
+            </a:r>
+            <a:r>
+              <a:rPr lang="en-US" altLang="ko-KR" sz="3800" dirty="0" smtClean="0">
+                <a:solidFill>
+                  <a:srgbClr val="000000">
+                    <a:alpha val="100000"/>
+                  </a:srgbClr>
+                </a:solidFill>
+                <a:latin typeface="맑은 고딕"/>
+                <a:cs typeface="Arial"/>
+              </a:rPr>
+              <a:t>FIFO </a:t>
+            </a:r>
+            <a:r>
+              <a:rPr lang="ko-KR" altLang="en-US" sz="3800" dirty="0">
+                <a:solidFill>
+                  <a:srgbClr val="000000">
+                    <a:alpha val="100000"/>
+                  </a:srgbClr>
+                </a:solidFill>
+                <a:latin typeface="맑은 고딕"/>
+                <a:cs typeface="Arial"/>
+              </a:rPr>
+              <a:t>→ </a:t>
+            </a:r>
+            <a:r>
+              <a:rPr sz="3800" b="0" i="0" strike="noStrike" dirty="0" smtClean="0">
+                <a:solidFill>
+                  <a:srgbClr val="000000">
+                    <a:alpha val="100000"/>
+                  </a:srgbClr>
+                </a:solidFill>
+                <a:latin typeface="맑은 고딕"/>
+                <a:cs typeface="Arial"/>
+              </a:rPr>
+              <a:t>UART </a:t>
+            </a:r>
+            <a:r>
+              <a:rPr sz="3800" b="0" i="0" strike="noStrike" dirty="0" err="1" smtClean="0">
+                <a:solidFill>
+                  <a:srgbClr val="000000">
+                    <a:alpha val="100000"/>
+                  </a:srgbClr>
+                </a:solidFill>
+                <a:latin typeface="맑은 고딕"/>
+                <a:cs typeface="Arial"/>
+              </a:rPr>
+              <a:t>TX데이터</a:t>
+            </a:r>
+            <a:r>
+              <a:rPr sz="3800" b="0" i="0" strike="noStrike" dirty="0" smtClean="0">
+                <a:solidFill>
+                  <a:srgbClr val="000000">
+                    <a:alpha val="100000"/>
+                  </a:srgbClr>
+                </a:solidFill>
+                <a:latin typeface="맑은 고딕"/>
+                <a:cs typeface="Arial"/>
+              </a:rPr>
+              <a:t> </a:t>
+            </a:r>
+            <a:r>
+              <a:rPr sz="3800" b="0" i="0" strike="noStrike" dirty="0" err="1">
+                <a:solidFill>
+                  <a:srgbClr val="000000">
+                    <a:alpha val="100000"/>
+                  </a:srgbClr>
+                </a:solidFill>
+                <a:latin typeface="맑은 고딕"/>
+                <a:cs typeface="Arial"/>
+              </a:rPr>
+              <a:t>흐름</a:t>
+            </a:r>
+            <a:r>
+              <a:rPr sz="3800" b="0" i="0" strike="noStrike" dirty="0">
+                <a:solidFill>
+                  <a:srgbClr val="000000">
+                    <a:alpha val="100000"/>
+                  </a:srgbClr>
+                </a:solidFill>
+                <a:latin typeface="맑은 고딕"/>
+                <a:cs typeface="Arial"/>
+              </a:rPr>
+              <a:t> </a:t>
+            </a:r>
+            <a:r>
+              <a:rPr sz="3800" b="0" i="0" strike="noStrike" dirty="0" err="1">
+                <a:solidFill>
+                  <a:srgbClr val="000000">
+                    <a:alpha val="100000"/>
+                  </a:srgbClr>
+                </a:solidFill>
+                <a:latin typeface="맑은 고딕"/>
+                <a:cs typeface="Arial"/>
+              </a:rPr>
+              <a:t>검증</a:t>
+            </a:r>
+            <a:endParaRPr sz="3800" b="0" i="0" strike="noStrike" dirty="0">
               <a:solidFill>
                 <a:srgbClr val="000000">
                   <a:alpha val="100000"/>
@@ -20351,8 +20586,22 @@
             <a:pPr lvl="0" algn="l">
               <a:defRPr/>
             </a:pPr>
-            <a:r>
-              <a:rPr sz="3800" b="0" i="0" strike="noStrike">
+            <a:endParaRPr sz="3800" b="0" i="0" strike="noStrike" dirty="0">
+              <a:solidFill>
+                <a:srgbClr val="000000">
+                  <a:alpha val="100000"/>
+                </a:srgbClr>
+              </a:solidFill>
+              <a:latin typeface="맑은 고딕"/>
+              <a:cs typeface="Arial"/>
+            </a:endParaRPr>
+          </a:p>
+          <a:p>
+            <a:pPr lvl="0" algn="l">
+              <a:defRPr/>
+            </a:pPr>
+            <a:r>
+              <a:rPr sz="3800" b="0" i="0" strike="noStrike" dirty="0">
                 <a:solidFill>
                   <a:srgbClr val="000000">
                     <a:alpha val="100000"/>
@@ -20361,14 +20610,45 @@
                 <a:latin typeface="맑은 고딕"/>
                 <a:cs typeface="Arial"/>
               </a:rPr>
-              <a:t>FIFO Full/Empty 동작 검증</a:t>
-            </a:r>
-          </a:p>
-          <a:p>
-            <a:pPr lvl="0" algn="l">
-              <a:defRPr/>
-            </a:pPr>
-            <a:endParaRPr sz="3800" b="0" i="0" strike="noStrike">
+              <a:t>FIFO Full/Empty </a:t>
+            </a:r>
+            <a:r>
+              <a:rPr sz="3800" b="0" i="0" strike="noStrike" dirty="0" err="1">
+                <a:solidFill>
+                  <a:srgbClr val="000000">
+                    <a:alpha val="100000"/>
+                  </a:srgbClr>
+                </a:solidFill>
+                <a:latin typeface="맑은 고딕"/>
+                <a:cs typeface="Arial"/>
+              </a:rPr>
+              <a:t>동작</a:t>
+            </a:r>
+            <a:r>
+              <a:rPr sz="3800" b="0" i="0" strike="noStrike" dirty="0">
+                <a:solidFill>
+                  <a:srgbClr val="000000">
+                    <a:alpha val="100000"/>
+                  </a:srgbClr>
+                </a:solidFill>
+                <a:latin typeface="맑은 고딕"/>
+                <a:cs typeface="Arial"/>
+              </a:rPr>
+              <a:t> </a:t>
+            </a:r>
+            <a:r>
+              <a:rPr sz="3800" b="0" i="0" strike="noStrike" dirty="0" err="1">
+                <a:solidFill>
+                  <a:srgbClr val="000000">
+                    <a:alpha val="100000"/>
+                  </a:srgbClr>
+                </a:solidFill>
+                <a:latin typeface="맑은 고딕"/>
+                <a:cs typeface="Arial"/>
+              </a:rPr>
+              <a:t>검증</a:t>
+            </a:r>
+            <a:endParaRPr sz="3800" b="0" i="0" strike="noStrike" dirty="0">
               <a:solidFill>
                 <a:srgbClr val="000000">
                   <a:alpha val="100000"/>
@@ -20382,8 +20662,22 @@
             <a:pPr lvl="0" algn="l">
               <a:defRPr/>
             </a:pPr>
-            <a:r>
-              <a:rPr sz="3800" b="0" i="0" strike="noStrike">
+            <a:endParaRPr sz="3800" b="0" i="0" strike="noStrike" dirty="0">
+              <a:solidFill>
+                <a:srgbClr val="000000">
+                  <a:alpha val="100000"/>
+                </a:srgbClr>
+              </a:solidFill>
+              <a:latin typeface="맑은 고딕"/>
+              <a:cs typeface="Arial"/>
+            </a:endParaRPr>
+          </a:p>
+          <a:p>
+            <a:pPr lvl="0" algn="l">
+              <a:defRPr/>
+            </a:pPr>
+            <a:r>
+              <a:rPr sz="3800" b="0" i="0" strike="noStrike" dirty="0">
                 <a:solidFill>
                   <a:srgbClr val="000000">
                     <a:alpha val="100000"/>
@@ -20392,14 +20686,93 @@
                 <a:latin typeface="맑은 고딕"/>
                 <a:cs typeface="Arial"/>
               </a:rPr>
-              <a:t>Baud Rate 기반 UART 타이밍 정확성 검증</a:t>
-            </a:r>
-          </a:p>
-          <a:p>
-            <a:pPr lvl="0" algn="l">
-              <a:defRPr/>
-            </a:pPr>
-            <a:endParaRPr sz="3800" b="0" i="0" strike="noStrike">
+              <a:t>Baud Rate </a:t>
+            </a:r>
+            <a:r>
+              <a:rPr sz="3800" b="0" i="0" strike="noStrike" dirty="0" err="1">
+                <a:solidFill>
+                  <a:srgbClr val="000000">
+                    <a:alpha val="100000"/>
+                  </a:srgbClr>
+                </a:solidFill>
+                <a:latin typeface="맑은 고딕"/>
+                <a:cs typeface="Arial"/>
+              </a:rPr>
+              <a:t>기반</a:t>
+            </a:r>
+            <a:r>
+              <a:rPr sz="3800" b="0" i="0" strike="noStrike" dirty="0">
+                <a:solidFill>
+                  <a:srgbClr val="000000">
+                    <a:alpha val="100000"/>
+                  </a:srgbClr>
+                </a:solidFill>
+                <a:latin typeface="맑은 고딕"/>
+                <a:cs typeface="Arial"/>
+              </a:rPr>
+              <a:t> UART </a:t>
+            </a:r>
+            <a:r>
+              <a:rPr sz="3800" b="0" i="0" strike="noStrike" dirty="0" err="1">
+                <a:solidFill>
+                  <a:srgbClr val="000000">
+                    <a:alpha val="100000"/>
+                  </a:srgbClr>
+                </a:solidFill>
+                <a:latin typeface="맑은 고딕"/>
+                <a:cs typeface="Arial"/>
+              </a:rPr>
+              <a:t>타이밍</a:t>
+            </a:r>
+            <a:r>
+              <a:rPr sz="3800" b="0" i="0" strike="noStrike" dirty="0">
+                <a:solidFill>
+                  <a:srgbClr val="000000">
+                    <a:alpha val="100000"/>
+                  </a:srgbClr>
+                </a:solidFill>
+                <a:latin typeface="맑은 고딕"/>
+                <a:cs typeface="Arial"/>
+              </a:rPr>
+              <a:t> </a:t>
+            </a:r>
+            <a:r>
+              <a:rPr sz="3800" b="0" i="0" strike="noStrike" dirty="0" err="1">
+                <a:solidFill>
+                  <a:srgbClr val="000000">
+                    <a:alpha val="100000"/>
+                  </a:srgbClr>
+                </a:solidFill>
+                <a:latin typeface="맑은 고딕"/>
+                <a:cs typeface="Arial"/>
+              </a:rPr>
+              <a:t>정확성</a:t>
+            </a:r>
+            <a:r>
+              <a:rPr sz="3800" b="0" i="0" strike="noStrike" dirty="0">
+                <a:solidFill>
+                  <a:srgbClr val="000000">
+                    <a:alpha val="100000"/>
+                  </a:srgbClr>
+                </a:solidFill>
+                <a:latin typeface="맑은 고딕"/>
+                <a:cs typeface="Arial"/>
+              </a:rPr>
+              <a:t> </a:t>
+            </a:r>
+            <a:r>
+              <a:rPr sz="3800" b="0" i="0" strike="noStrike" dirty="0" err="1">
+                <a:solidFill>
+                  <a:srgbClr val="000000">
+                    <a:alpha val="100000"/>
+                  </a:srgbClr>
+                </a:solidFill>
+                <a:latin typeface="맑은 고딕"/>
+                <a:cs typeface="Arial"/>
+              </a:rPr>
+              <a:t>검증</a:t>
+            </a:r>
+            <a:endParaRPr sz="3800" b="0" i="0" strike="noStrike" dirty="0">
               <a:solidFill>
                 <a:srgbClr val="000000">
                   <a:alpha val="100000"/>
@@ -20413,8 +20786,22 @@
             <a:pPr lvl="0" algn="l">
               <a:defRPr/>
             </a:pPr>
-            <a:r>
-              <a:rPr sz="3800" b="0" i="0" strike="noStrike">
+            <a:endParaRPr sz="3800" b="0" i="0" strike="noStrike" dirty="0">
+              <a:solidFill>
+                <a:srgbClr val="000000">
+                  <a:alpha val="100000"/>
+                </a:srgbClr>
+              </a:solidFill>
+              <a:latin typeface="맑은 고딕"/>
+              <a:cs typeface="Arial"/>
+            </a:endParaRPr>
+          </a:p>
+          <a:p>
+            <a:pPr lvl="0" algn="l">
+              <a:defRPr/>
+            </a:pPr>
+            <a:r>
+              <a:rPr sz="3800" b="0" i="0" strike="noStrike" dirty="0">
                 <a:solidFill>
                   <a:srgbClr val="000000">
                     <a:alpha val="100000"/>
@@ -20423,14 +20810,62 @@
                 <a:latin typeface="맑은 고딕"/>
                 <a:cs typeface="Arial"/>
               </a:rPr>
-              <a:t>Stopwatch 기능 검증 (Start/Stop/Reset)</a:t>
+              <a:t>Stopwatch </a:t>
+            </a:r>
+            <a:r>
+              <a:rPr sz="3800" b="0" i="0" strike="noStrike" dirty="0" err="1">
+                <a:solidFill>
+                  <a:srgbClr val="000000">
+                    <a:alpha val="100000"/>
+                  </a:srgbClr>
+                </a:solidFill>
+                <a:latin typeface="맑은 고딕"/>
+                <a:cs typeface="Arial"/>
+              </a:rPr>
+              <a:t>기능</a:t>
+            </a:r>
+            <a:r>
+              <a:rPr sz="3800" b="0" i="0" strike="noStrike" dirty="0">
+                <a:solidFill>
+                  <a:srgbClr val="000000">
+                    <a:alpha val="100000"/>
+                  </a:srgbClr>
+                </a:solidFill>
+                <a:latin typeface="맑은 고딕"/>
+                <a:cs typeface="Arial"/>
+              </a:rPr>
+              <a:t> </a:t>
+            </a:r>
+            <a:r>
+              <a:rPr sz="3800" b="0" i="0" strike="noStrike" dirty="0" err="1">
+                <a:solidFill>
+                  <a:srgbClr val="000000">
+                    <a:alpha val="100000"/>
+                  </a:srgbClr>
+                </a:solidFill>
+                <a:latin typeface="맑은 고딕"/>
+                <a:cs typeface="Arial"/>
+              </a:rPr>
+              <a:t>검증</a:t>
+            </a:r>
+            <a:r>
+              <a:rPr sz="3800" b="0" i="0" strike="noStrike" dirty="0">
+                <a:solidFill>
+                  <a:srgbClr val="000000">
+                    <a:alpha val="100000"/>
+                  </a:srgbClr>
+                </a:solidFill>
+                <a:latin typeface="맑은 고딕"/>
+                <a:cs typeface="Arial"/>
+              </a:rPr>
+              <a:t> (Start/Stop/Reset)</a:t>
             </a:r>
           </a:p>
           <a:p>
             <a:pPr lvl="0" algn="l">
               <a:defRPr/>
             </a:pPr>
-            <a:endParaRPr sz="3800" b="0" i="0" strike="noStrike">
+            <a:endParaRPr sz="3800" b="0" i="0" strike="noStrike" dirty="0">
               <a:solidFill>
                 <a:srgbClr val="000000">
                   <a:alpha val="100000"/>
@@ -20445,7 +20880,7 @@
               <a:defRPr/>
             </a:pPr>
             <a:r>
-              <a:rPr sz="3800" b="0" i="0" strike="noStrike">
+              <a:rPr sz="3800" b="0" i="0" strike="noStrike" dirty="0">
                 <a:solidFill>
                   <a:srgbClr val="000000">
                     <a:alpha val="100000"/>
@@ -20457,7 +20892,7 @@
               <a:t>Clock </a:t>
             </a:r>
             <a:r>
-              <a:rPr lang="ko-KR" altLang="en-US" sz="3800" b="0" i="0" strike="noStrike">
+              <a:rPr lang="ko-KR" altLang="en-US" sz="3800" b="0" i="0" strike="noStrike" dirty="0">
                 <a:solidFill>
                   <a:srgbClr val="000000">
                     <a:alpha val="100000"/>
@@ -20469,19 +20904,7 @@
               <a:t>시간설정</a:t>
             </a:r>
             <a:r>
-              <a:rPr sz="3800" b="0" i="0" strike="noStrike">
-                <a:solidFill>
-                  <a:srgbClr val="000000">
-                    <a:alpha val="100000"/>
-                  </a:srgbClr>
-                </a:solidFill>
-                <a:latin typeface="맑은 고딕"/>
-                <a:cs typeface="Arial"/>
-              </a:rPr>
-              <a:t> 정확성 검증</a:t>
-            </a:r>
-            <a:r>
-              <a:rPr lang="en-US" altLang="ko-KR" sz="3800" b="0" i="0" strike="noStrike">
+              <a:rPr sz="3800" b="0" i="0" strike="noStrike" dirty="0">
                 <a:solidFill>
                   <a:srgbClr val="000000">
                     <a:alpha val="100000"/>
@@ -20493,7 +20916,7 @@
               <a:t> </a:t>
             </a:r>
             <a:r>
-              <a:rPr sz="3800" b="0" i="0" strike="noStrike">
+              <a:rPr sz="3800" b="0" i="0" strike="noStrike" dirty="0" err="1">
                 <a:solidFill>
                   <a:srgbClr val="000000">
                     <a:alpha val="100000"/>
@@ -20502,8 +20925,77 @@
                 <a:latin typeface="맑은 고딕"/>
                 <a:cs typeface="Arial"/>
               </a:rPr>
-              <a:t>을 수행</a:t>
-            </a:r>
+              <a:t>정확성</a:t>
+            </a:r>
+            <a:r>
+              <a:rPr sz="3800" b="0" i="0" strike="noStrike" dirty="0">
+                <a:solidFill>
+                  <a:srgbClr val="000000">
+                    <a:alpha val="100000"/>
+                  </a:srgbClr>
+                </a:solidFill>
+                <a:latin typeface="맑은 고딕"/>
+                <a:cs typeface="Arial"/>
+              </a:rPr>
+              <a:t> </a:t>
+            </a:r>
+            <a:r>
+              <a:rPr sz="3800" b="0" i="0" strike="noStrike" dirty="0" err="1">
+                <a:solidFill>
+                  <a:srgbClr val="000000">
+                    <a:alpha val="100000"/>
+                  </a:srgbClr>
+                </a:solidFill>
+                <a:latin typeface="맑은 고딕"/>
+                <a:cs typeface="Arial"/>
+              </a:rPr>
+              <a:t>검증</a:t>
+            </a:r>
+            <a:r>
+              <a:rPr lang="en-US" altLang="ko-KR" sz="3800" b="0" i="0" strike="noStrike" dirty="0">
+                <a:solidFill>
+                  <a:srgbClr val="000000">
+                    <a:alpha val="100000"/>
+                  </a:srgbClr>
+                </a:solidFill>
+                <a:latin typeface="맑은 고딕"/>
+                <a:cs typeface="Arial"/>
+              </a:rPr>
+              <a:t> </a:t>
+            </a:r>
+            <a:r>
+              <a:rPr sz="3800" b="0" i="0" strike="noStrike" dirty="0">
+                <a:solidFill>
+                  <a:srgbClr val="000000">
+                    <a:alpha val="100000"/>
+                  </a:srgbClr>
+                </a:solidFill>
+                <a:latin typeface="맑은 고딕"/>
+                <a:cs typeface="Arial"/>
+              </a:rPr>
+              <a:t>을 </a:t>
+            </a:r>
+            <a:r>
+              <a:rPr sz="3800" b="0" i="0" strike="noStrike" dirty="0" err="1">
+                <a:solidFill>
+                  <a:srgbClr val="000000">
+                    <a:alpha val="100000"/>
+                  </a:srgbClr>
+                </a:solidFill>
+                <a:latin typeface="맑은 고딕"/>
+                <a:cs typeface="Arial"/>
+              </a:rPr>
+              <a:t>수행</a:t>
+            </a:r>
+            <a:endParaRPr sz="3800" b="0" i="0" strike="noStrike" dirty="0">
+              <a:solidFill>
+                <a:srgbClr val="000000">
+                  <a:alpha val="100000"/>
+                </a:srgbClr>
+              </a:solidFill>
+              <a:latin typeface="맑은 고딕"/>
+              <a:cs typeface="Arial"/>
+            </a:endParaRPr>
           </a:p>
         </p:txBody>
       </p:sp>
@@ -32452,7 +32944,7 @@
         </p:blipFill>
         <p:spPr>
           <a:xfrm rot="5400000">
-            <a:off x="7753350" y="4076700"/>
+            <a:off x="5695950" y="4076700"/>
             <a:ext cx="889000" cy="5270500"/>
           </a:xfrm>
           <a:prstGeom prst="rect">
@@ -32476,7 +32968,7 @@
         </p:blipFill>
         <p:spPr>
           <a:xfrm rot="5400000">
-            <a:off x="13277850" y="4076700"/>
+            <a:off x="11220450" y="4076700"/>
             <a:ext cx="889000" cy="5270500"/>
           </a:xfrm>
           <a:prstGeom prst="rect">
@@ -32500,7 +32992,7 @@
         </p:blipFill>
         <p:spPr>
           <a:xfrm rot="5400000">
-            <a:off x="3854450" y="7975600"/>
+            <a:off x="1797050" y="7975600"/>
             <a:ext cx="3429000" cy="12700"/>
           </a:xfrm>
           <a:prstGeom prst="rect">
@@ -32524,7 +33016,7 @@
         </p:blipFill>
         <p:spPr>
           <a:xfrm rot="5400000">
-            <a:off x="9378950" y="7975600"/>
+            <a:off x="7321550" y="7975600"/>
             <a:ext cx="3429000" cy="12700"/>
           </a:xfrm>
           <a:prstGeom prst="rect">
@@ -32540,7 +33032,7 @@
         </p:nvSpPr>
         <p:spPr>
           <a:xfrm>
-            <a:off x="6064250" y="6426200"/>
+            <a:off x="4006850" y="6426200"/>
             <a:ext cx="3352800" cy="571500"/>
           </a:xfrm>
           <a:prstGeom prst="rect">
@@ -32579,7 +33071,7 @@
         </p:nvSpPr>
         <p:spPr>
           <a:xfrm>
-            <a:off x="11588750" y="6426200"/>
+            <a:off x="9531350" y="6426200"/>
             <a:ext cx="3352800" cy="571500"/>
           </a:xfrm>
           <a:prstGeom prst="rect">
@@ -32618,7 +33110,7 @@
         </p:nvSpPr>
         <p:spPr>
           <a:xfrm>
-            <a:off x="6064248" y="7454900"/>
+            <a:off x="4006848" y="7454900"/>
             <a:ext cx="4768852" cy="1460500"/>
           </a:xfrm>
           <a:prstGeom prst="rect">
@@ -32695,7 +33187,7 @@
         </p:nvSpPr>
         <p:spPr>
           <a:xfrm>
-            <a:off x="11588748" y="7454900"/>
+            <a:off x="9531348" y="7454900"/>
             <a:ext cx="3898900" cy="1460500"/>
           </a:xfrm>
           <a:prstGeom prst="rect">
@@ -32769,6 +33261,177 @@
           </a:prstGeom>
         </p:spPr>
       </p:pic>
+      <p:pic>
+        <p:nvPicPr>
+          <p:cNvPr id="14" name="Picture 11"/>
+          <p:cNvPicPr>
+            <a:picLocks noChangeAspect="1"/>
+          </p:cNvPicPr>
+          <p:nvPr/>
+        </p:nvPicPr>
+        <p:blipFill rotWithShape="1">
+          <a:blip r:embed="rId4"/>
+          <a:stretch>
+            <a:fillRect/>
+          </a:stretch>
+        </p:blipFill>
+        <p:spPr>
+          <a:xfrm rot="5400000">
+            <a:off x="16744950" y="4076700"/>
+            <a:ext cx="889000" cy="5270500"/>
+          </a:xfrm>
+          <a:prstGeom prst="rect">
+            <a:avLst/>
+          </a:prstGeom>
+        </p:spPr>
+      </p:pic>
+      <p:pic>
+        <p:nvPicPr>
+          <p:cNvPr id="17" name="Picture 15"/>
+          <p:cNvPicPr>
+            <a:picLocks noChangeAspect="1"/>
+          </p:cNvPicPr>
+          <p:nvPr/>
+        </p:nvPicPr>
+        <p:blipFill rotWithShape="1">
+          <a:blip r:embed="rId6"/>
+          <a:stretch>
+            <a:fillRect/>
+          </a:stretch>
+        </p:blipFill>
+        <p:spPr>
+          <a:xfrm rot="5400000">
+            <a:off x="12846050" y="7975600"/>
+            <a:ext cx="3429000" cy="12700"/>
+          </a:xfrm>
+          <a:prstGeom prst="rect">
+            <a:avLst/>
+          </a:prstGeom>
+        </p:spPr>
+      </p:pic>
+      <p:sp>
+        <p:nvSpPr>
+          <p:cNvPr id="18" name="TextBox 19"/>
+          <p:cNvSpPr txBox="1"/>
+          <p:nvPr/>
+        </p:nvSpPr>
+        <p:spPr>
+          <a:xfrm>
+            <a:off x="15055850" y="6426200"/>
+            <a:ext cx="3352800" cy="571500"/>
+          </a:xfrm>
+          <a:prstGeom prst="rect">
+            <a:avLst/>
+          </a:prstGeom>
+        </p:spPr>
+        <p:txBody>
+          <a:bodyPr lIns="0" tIns="0" rIns="0" bIns="0" anchor="t"/>
+          <a:lstStyle/>
+          <a:p>
+            <a:pPr lvl="0" algn="l">
+              <a:lnSpc>
+                <a:spcPct val="116199"/>
+              </a:lnSpc>
+              <a:defRPr/>
+            </a:pPr>
+            <a:r>
+              <a:rPr lang="en-US" sz="3200" b="0" i="0" u="none" strike="noStrike" dirty="0" smtClean="0">
+                <a:solidFill>
+                  <a:srgbClr val="000000"/>
+                </a:solidFill>
+                <a:latin typeface="Pretendard Bold"/>
+                <a:ea typeface="Pretendard Bold"/>
+                <a:cs typeface="Pretendard Bold"/>
+              </a:rPr>
+              <a:t>03</a:t>
+            </a:r>
+            <a:endParaRPr lang="en-US" sz="3200" b="0" i="0" u="none" strike="noStrike" dirty="0">
+              <a:solidFill>
+                <a:srgbClr val="000000"/>
+              </a:solidFill>
+              <a:latin typeface="Pretendard Bold"/>
+              <a:ea typeface="Pretendard Bold"/>
+              <a:cs typeface="Pretendard Bold"/>
+            </a:endParaRPr>
+          </a:p>
+        </p:txBody>
+      </p:sp>
+      <p:sp>
+        <p:nvSpPr>
+          <p:cNvPr id="21" name="TextBox 23"/>
+          <p:cNvSpPr txBox="1"/>
+          <p:nvPr/>
+        </p:nvSpPr>
+        <p:spPr>
+          <a:xfrm>
+            <a:off x="15055848" y="7454900"/>
+            <a:ext cx="6356352" cy="1460500"/>
+          </a:xfrm>
+          <a:prstGeom prst="rect">
+            <a:avLst/>
+          </a:prstGeom>
+        </p:spPr>
+        <p:txBody>
+          <a:bodyPr lIns="0" tIns="0" rIns="0" bIns="0" anchor="t"/>
+          <a:lstStyle/>
+          <a:p>
+            <a:pPr lvl="0" algn="l">
+              <a:lnSpc>
+                <a:spcPct val="120350"/>
+              </a:lnSpc>
+              <a:defRPr/>
+            </a:pPr>
+            <a:r>
+              <a:rPr lang="en-US" altLang="ko-KR" sz="3500" b="0" i="0" u="none" strike="noStrike" dirty="0">
+                <a:solidFill>
+                  <a:srgbClr val="000000"/>
+                </a:solidFill>
+                <a:latin typeface="Pretendard SemiBold"/>
+                <a:ea typeface="Pretendard SemiBold"/>
+                <a:cs typeface="Pretendard SemiBold"/>
+              </a:rPr>
+              <a:t>randomize</a:t>
+            </a:r>
+          </a:p>
+          <a:p>
+            <a:pPr lvl="0">
+              <a:lnSpc>
+                <a:spcPct val="120350"/>
+              </a:lnSpc>
+              <a:defRPr/>
+            </a:pPr>
+            <a:r>
+              <a:rPr lang="en-US" altLang="ko-KR" sz="3600" dirty="0" err="1" smtClean="0"/>
+              <a:t>fifo</a:t>
+            </a:r>
+            <a:r>
+              <a:rPr lang="en-US" altLang="ko-KR" sz="3600" dirty="0" smtClean="0"/>
+              <a:t>[full</a:t>
+            </a:r>
+            <a:r>
+              <a:rPr lang="en-US" altLang="ko-KR" sz="3600" dirty="0"/>
+              <a:t>] -&gt; </a:t>
+            </a:r>
+            <a:r>
+              <a:rPr lang="en-US" altLang="ko-KR" sz="3600" dirty="0">
+                <a:solidFill>
+                  <a:srgbClr val="000000"/>
+                </a:solidFill>
+                <a:latin typeface="noto"/>
+              </a:rPr>
+              <a:t>continuous output</a:t>
+            </a:r>
+            <a:endParaRPr lang="en-US" altLang="ko-KR" sz="3500" i="0" u="none" strike="noStrike" dirty="0">
+              <a:solidFill>
+                <a:srgbClr val="000000"/>
+              </a:solidFill>
+              <a:latin typeface="Pretendard SemiBold"/>
+              <a:ea typeface="Pretendard SemiBold"/>
+              <a:cs typeface="Pretendard SemiBold"/>
+            </a:endParaRPr>
+          </a:p>
+        </p:txBody>
+      </p:sp>
     </p:spTree>
     <p:extLst>
       <p:ext uri="{BB962C8B-B14F-4D97-AF65-F5344CB8AC3E}">
@@ -33080,13 +33743,13 @@
       </p:pic>
       <p:pic>
         <p:nvPicPr>
-          <p:cNvPr id="22" name="그림 21"/>
-          <p:cNvPicPr>
-            <a:picLocks noChangeAspect="1"/>
-          </p:cNvPicPr>
-          <p:nvPr/>
-        </p:nvPicPr>
-        <p:blipFill rotWithShape="1">
+          <p:cNvPr id="5" name="그림 4"/>
+          <p:cNvPicPr>
+            <a:picLocks noChangeAspect="1"/>
+          </p:cNvPicPr>
+          <p:nvPr/>
+        </p:nvPicPr>
+        <p:blipFill>
           <a:blip r:embed="rId7"/>
           <a:stretch>
             <a:fillRect/>
@@ -33094,8 +33757,8 @@
         </p:blipFill>
         <p:spPr>
           <a:xfrm>
-            <a:off x="1752600" y="2247900"/>
-            <a:ext cx="8008628" cy="10415759"/>
+            <a:off x="1524000" y="2144798"/>
+            <a:ext cx="7924800" cy="10351677"/>
           </a:xfrm>
           <a:prstGeom prst="rect">
             <a:avLst/>
@@ -33134,13 +33797,13 @@
       </p:grpSpPr>
       <p:pic>
         <p:nvPicPr>
-          <p:cNvPr id="12" name="그림 11"/>
-          <p:cNvPicPr>
-            <a:picLocks noChangeAspect="1"/>
-          </p:cNvPicPr>
-          <p:nvPr/>
-        </p:nvPicPr>
-        <p:blipFill rotWithShape="1">
+          <p:cNvPr id="14" name="그림 13"/>
+          <p:cNvPicPr>
+            <a:picLocks noChangeAspect="1"/>
+          </p:cNvPicPr>
+          <p:nvPr/>
+        </p:nvPicPr>
+        <p:blipFill>
           <a:blip r:embed="rId2"/>
           <a:stretch>
             <a:fillRect/>
@@ -33148,8 +33811,8 @@
         </p:blipFill>
         <p:spPr>
           <a:xfrm>
-            <a:off x="1752600" y="2247900"/>
-            <a:ext cx="8008628" cy="10415759"/>
+            <a:off x="1524000" y="2144798"/>
+            <a:ext cx="7924800" cy="10351677"/>
           </a:xfrm>
           <a:prstGeom prst="rect">
             <a:avLst/>
@@ -34999,13 +35662,13 @@
       </p:grpSpPr>
       <p:pic>
         <p:nvPicPr>
-          <p:cNvPr id="14" name="그림 13"/>
-          <p:cNvPicPr>
-            <a:picLocks noChangeAspect="1"/>
-          </p:cNvPicPr>
-          <p:nvPr/>
-        </p:nvPicPr>
-        <p:blipFill rotWithShape="1">
+          <p:cNvPr id="15" name="그림 14"/>
+          <p:cNvPicPr>
+            <a:picLocks noChangeAspect="1"/>
+          </p:cNvPicPr>
+          <p:nvPr/>
+        </p:nvPicPr>
+        <p:blipFill>
           <a:blip r:embed="rId2"/>
           <a:stretch>
             <a:fillRect/>
@@ -35013,8 +35676,8 @@
         </p:blipFill>
         <p:spPr>
           <a:xfrm>
-            <a:off x="1752600" y="2247900"/>
-            <a:ext cx="8008628" cy="10415759"/>
+            <a:off x="1524000" y="2144798"/>
+            <a:ext cx="7924800" cy="10351677"/>
           </a:xfrm>
           <a:prstGeom prst="rect">
             <a:avLst/>
@@ -35267,7 +35930,7 @@
         </p:nvSpPr>
         <p:spPr>
           <a:xfrm>
-            <a:off x="1981200" y="4980044"/>
+            <a:off x="1733643" y="5105400"/>
             <a:ext cx="2969527" cy="2030355"/>
           </a:xfrm>
           <a:prstGeom prst="rect">
@@ -35367,13 +36030,13 @@
       </p:grpSpPr>
       <p:pic>
         <p:nvPicPr>
-          <p:cNvPr id="50" name="그림 49"/>
-          <p:cNvPicPr>
-            <a:picLocks noChangeAspect="1"/>
-          </p:cNvPicPr>
-          <p:nvPr/>
-        </p:nvPicPr>
-        <p:blipFill rotWithShape="1">
+          <p:cNvPr id="51" name="그림 50"/>
+          <p:cNvPicPr>
+            <a:picLocks noChangeAspect="1"/>
+          </p:cNvPicPr>
+          <p:nvPr/>
+        </p:nvPicPr>
+        <p:blipFill>
           <a:blip r:embed="rId2"/>
           <a:stretch>
             <a:fillRect/>
@@ -35381,8 +36044,8 @@
         </p:blipFill>
         <p:spPr>
           <a:xfrm>
-            <a:off x="1752600" y="2247900"/>
-            <a:ext cx="8008628" cy="10415759"/>
+            <a:off x="1524000" y="2144798"/>
+            <a:ext cx="7924800" cy="10351677"/>
           </a:xfrm>
           <a:prstGeom prst="rect">
             <a:avLst/>
@@ -36858,6 +37521,30 @@
       </p:grpSpPr>
       <p:pic>
         <p:nvPicPr>
+          <p:cNvPr id="14" name="그림 13"/>
+          <p:cNvPicPr>
+            <a:picLocks noChangeAspect="1"/>
+          </p:cNvPicPr>
+          <p:nvPr/>
+        </p:nvPicPr>
+        <p:blipFill>
+          <a:blip r:embed="rId2"/>
+          <a:stretch>
+            <a:fillRect/>
+          </a:stretch>
+        </p:blipFill>
+        <p:spPr>
+          <a:xfrm>
+            <a:off x="1524000" y="2144798"/>
+            <a:ext cx="7924800" cy="10351677"/>
+          </a:xfrm>
+          <a:prstGeom prst="rect">
+            <a:avLst/>
+          </a:prstGeom>
+        </p:spPr>
+      </p:pic>
+      <p:pic>
+        <p:nvPicPr>
           <p:cNvPr id="2" name="Picture 8"/>
           <p:cNvPicPr>
             <a:picLocks noChangeAspect="1"/>
@@ -36865,7 +37552,7 @@
           <p:nvPr/>
         </p:nvPicPr>
         <p:blipFill rotWithShape="1">
-          <a:blip r:embed="rId2"/>
+          <a:blip r:embed="rId3"/>
           <a:stretch>
             <a:fillRect/>
           </a:stretch>
@@ -36925,7 +37612,7 @@
           <p:nvPr/>
         </p:nvPicPr>
         <p:blipFill rotWithShape="1">
-          <a:blip r:embed="rId3"/>
+          <a:blip r:embed="rId4"/>
           <a:stretch>
             <a:fillRect/>
           </a:stretch>
@@ -36949,7 +37636,7 @@
           <p:nvPr/>
         </p:nvPicPr>
         <p:blipFill rotWithShape="1">
-          <a:blip r:embed="rId2"/>
+          <a:blip r:embed="rId3"/>
           <a:stretch>
             <a:fillRect/>
           </a:stretch>
@@ -36973,7 +37660,7 @@
           <p:nvPr/>
         </p:nvPicPr>
         <p:blipFill rotWithShape="1">
-          <a:blip r:embed="rId4"/>
+          <a:blip r:embed="rId5"/>
           <a:stretch>
             <a:fillRect/>
           </a:stretch>
@@ -37055,7 +37742,7 @@
           <p:nvPr/>
         </p:nvPicPr>
         <p:blipFill rotWithShape="1">
-          <a:blip r:embed="rId3"/>
+          <a:blip r:embed="rId4"/>
           <a:stretch>
             <a:fillRect/>
           </a:stretch>
@@ -37079,7 +37766,7 @@
           <p:nvPr/>
         </p:nvPicPr>
         <p:blipFill rotWithShape="1">
-          <a:blip r:embed="rId4"/>
+          <a:blip r:embed="rId5"/>
           <a:stretch>
             <a:fillRect/>
           </a:stretch>
@@ -37088,30 +37775,6 @@
           <a:xfrm rot="16200000">
             <a:off x="20523200" y="12369800"/>
             <a:ext cx="304800" cy="304800"/>
-          </a:xfrm>
-          <a:prstGeom prst="rect">
-            <a:avLst/>
-          </a:prstGeom>
-        </p:spPr>
-      </p:pic>
-      <p:pic>
-        <p:nvPicPr>
-          <p:cNvPr id="11" name="그림 10"/>
-          <p:cNvPicPr>
-            <a:picLocks noChangeAspect="1"/>
-          </p:cNvPicPr>
-          <p:nvPr/>
-        </p:nvPicPr>
-        <p:blipFill rotWithShape="1">
-          <a:blip r:embed="rId5"/>
-          <a:stretch>
-            <a:fillRect/>
-          </a:stretch>
-        </p:blipFill>
-        <p:spPr>
-          <a:xfrm>
-            <a:off x="1752600" y="2247900"/>
-            <a:ext cx="8008628" cy="10415759"/>
           </a:xfrm>
           <a:prstGeom prst="rect">
             <a:avLst/>
@@ -37126,8 +37789,8 @@
         </p:nvSpPr>
         <p:spPr>
           <a:xfrm>
-            <a:off x="6400800" y="2667000"/>
-            <a:ext cx="2969527" cy="1208001"/>
+            <a:off x="4703170" y="2590800"/>
+            <a:ext cx="4286157" cy="1208001"/>
           </a:xfrm>
           <a:prstGeom prst="rect">
             <a:avLst/>
@@ -37528,30 +38191,6 @@
           </a:prstGeom>
         </p:spPr>
       </p:pic>
-      <p:pic>
-        <p:nvPicPr>
-          <p:cNvPr id="14" name="그림 13"/>
-          <p:cNvPicPr>
-            <a:picLocks noChangeAspect="1"/>
-          </p:cNvPicPr>
-          <p:nvPr/>
-        </p:nvPicPr>
-        <p:blipFill rotWithShape="1">
-          <a:blip r:embed="rId6"/>
-          <a:stretch>
-            <a:fillRect/>
-          </a:stretch>
-        </p:blipFill>
-        <p:spPr>
-          <a:xfrm>
-            <a:off x="762000" y="3433450"/>
-            <a:ext cx="6858000" cy="8919290"/>
-          </a:xfrm>
-          <a:prstGeom prst="rect">
-            <a:avLst/>
-          </a:prstGeom>
-        </p:spPr>
-      </p:pic>
       <p:sp>
         <p:nvSpPr>
           <p:cNvPr id="15" name="직사각형 14"/>
@@ -37791,6 +38430,30 @@
           </a:fontRef>
         </p:style>
       </p:cxnSp>
+      <p:pic>
+        <p:nvPicPr>
+          <p:cNvPr id="22" name="그림 21"/>
+          <p:cNvPicPr>
+            <a:picLocks noChangeAspect="1"/>
+          </p:cNvPicPr>
+          <p:nvPr/>
+        </p:nvPicPr>
+        <p:blipFill>
+          <a:blip r:embed="rId6"/>
+          <a:stretch>
+            <a:fillRect/>
+          </a:stretch>
+        </p:blipFill>
+        <p:spPr>
+          <a:xfrm>
+            <a:off x="1523275" y="3701296"/>
+            <a:ext cx="5891632" cy="7695875"/>
+          </a:xfrm>
+          <a:prstGeom prst="rect">
+            <a:avLst/>
+          </a:prstGeom>
+        </p:spPr>
+      </p:pic>
     </p:spTree>
     <p:extLst>
       <p:ext uri="{BB962C8B-B14F-4D97-AF65-F5344CB8AC3E}">
@@ -41906,17 +42569,17 @@
               <a:defRPr/>
             </a:pPr>
             <a:r>
-              <a:rPr lang="en-US" altLang="ko-KR" sz="5400" b="1"/>
+              <a:rPr lang="en-US" altLang="ko-KR" sz="5400" b="1" dirty="0"/>
               <a:t>- Verification(random </a:t>
             </a:r>
             <a:r>
-              <a:rPr lang="en-US" altLang="ko-KR" sz="5400" b="1">
+              <a:rPr lang="en-US" altLang="ko-KR" sz="5400" b="1" dirty="0">
                 <a:sym typeface="Wingdings"/>
               </a:rPr>
               <a:t>1000 cycle</a:t>
             </a:r>
             <a:r>
-              <a:rPr lang="en-US" altLang="ko-KR" sz="5400" b="1"/>
+              <a:rPr lang="en-US" altLang="ko-KR" sz="5400" b="1" dirty="0"/>
               <a:t>)</a:t>
             </a:r>
           </a:p>
@@ -42280,6 +42943,364 @@
           </a:p>
         </p:txBody>
       </p:sp>
+      <p:pic>
+        <p:nvPicPr>
+          <p:cNvPr id="11" name="그림 10"/>
+          <p:cNvPicPr>
+            <a:picLocks noChangeAspect="1"/>
+          </p:cNvPicPr>
+          <p:nvPr/>
+        </p:nvPicPr>
+        <p:blipFill rotWithShape="1">
+          <a:blip r:embed="rId5"/>
+          <a:stretch>
+            <a:fillRect/>
+          </a:stretch>
+        </p:blipFill>
+        <p:spPr>
+          <a:xfrm>
+            <a:off x="1828800" y="3733800"/>
+            <a:ext cx="11049939" cy="7218871"/>
+          </a:xfrm>
+          <a:prstGeom prst="rect">
+            <a:avLst/>
+          </a:prstGeom>
+        </p:spPr>
+      </p:pic>
+      <p:pic>
+        <p:nvPicPr>
+          <p:cNvPr id="20" name="그림 19"/>
+          <p:cNvPicPr>
+            <a:picLocks noChangeAspect="1"/>
+          </p:cNvPicPr>
+          <p:nvPr/>
+        </p:nvPicPr>
+        <p:blipFill rotWithShape="1">
+          <a:blip r:embed="rId6"/>
+          <a:stretch>
+            <a:fillRect/>
+          </a:stretch>
+        </p:blipFill>
+        <p:spPr>
+          <a:xfrm>
+            <a:off x="11277600" y="3821151"/>
+            <a:ext cx="12651178" cy="5515745"/>
+          </a:xfrm>
+          <a:prstGeom prst="rect">
+            <a:avLst/>
+          </a:prstGeom>
+        </p:spPr>
+      </p:pic>
+    </p:spTree>
+    <p:extLst>
+      <p:ext uri="{BB962C8B-B14F-4D97-AF65-F5344CB8AC3E}">
+        <p14:creationId xmlns:p14="http://schemas.microsoft.com/office/powerpoint/2010/main" val="939488351"/>
+      </p:ext>
+    </p:extLst>
+  </p:cSld>
+  <p:clrMapOvr>
+    <a:masterClrMapping/>
+  </p:clrMapOvr>
+</p:sld>
+</file>
+
+<file path=ppt/slides/slide73.xml><?xml version="1.0" encoding="utf-8"?>
+<p:sld xmlns:a="http://schemas.openxmlformats.org/drawingml/2006/main" xmlns:r="http://schemas.openxmlformats.org/officeDocument/2006/relationships" xmlns:p="http://schemas.openxmlformats.org/presentationml/2006/main">
+  <p:cSld>
+    <p:spTree>
+      <p:nvGrpSpPr>
+        <p:cNvPr id="1" name=""/>
+        <p:cNvGrpSpPr/>
+        <p:nvPr/>
+      </p:nvGrpSpPr>
+      <p:grpSpPr>
+        <a:xfrm>
+          <a:off x="0" y="0"/>
+          <a:ext cx="0" cy="0"/>
+          <a:chOff x="0" y="0"/>
+          <a:chExt cx="0" cy="0"/>
+        </a:xfrm>
+      </p:grpSpPr>
+      <p:pic>
+        <p:nvPicPr>
+          <p:cNvPr id="2" name="Picture 8"/>
+          <p:cNvPicPr>
+            <a:picLocks noChangeAspect="1"/>
+          </p:cNvPicPr>
+          <p:nvPr/>
+        </p:nvPicPr>
+        <p:blipFill rotWithShape="1">
+          <a:blip r:embed="rId2"/>
+          <a:stretch>
+            <a:fillRect/>
+          </a:stretch>
+        </p:blipFill>
+        <p:spPr>
+          <a:xfrm>
+            <a:off x="1016000" y="12674600"/>
+            <a:ext cx="22352000" cy="25400"/>
+          </a:xfrm>
+          <a:prstGeom prst="rect">
+            <a:avLst/>
+          </a:prstGeom>
+        </p:spPr>
+      </p:pic>
+      <p:sp>
+        <p:nvSpPr>
+          <p:cNvPr id="7" name="TextBox 10"/>
+          <p:cNvSpPr txBox="1"/>
+          <p:nvPr/>
+        </p:nvSpPr>
+        <p:spPr>
+          <a:xfrm>
+            <a:off x="1096370" y="838200"/>
+            <a:ext cx="3606800" cy="1181100"/>
+          </a:xfrm>
+          <a:prstGeom prst="rect">
+            <a:avLst/>
+          </a:prstGeom>
+        </p:spPr>
+        <p:txBody>
+          <a:bodyPr lIns="0" tIns="0" rIns="0" bIns="0" anchor="t"/>
+          <a:lstStyle/>
+          <a:p>
+            <a:pPr lvl="0" algn="l">
+              <a:lnSpc>
+                <a:spcPct val="116199"/>
+              </a:lnSpc>
+              <a:defRPr/>
+            </a:pPr>
+            <a:endParaRPr lang="ko-KR" altLang="en-US" sz="6666" b="0" i="0" u="none" strike="noStrike">
+              <a:solidFill>
+                <a:srgbClr val="000000"/>
+              </a:solidFill>
+              <a:latin typeface="Pretendard Bold"/>
+              <a:ea typeface="Pretendard Bold"/>
+              <a:cs typeface="Pretendard Bold"/>
+            </a:endParaRPr>
+          </a:p>
+        </p:txBody>
+      </p:sp>
+      <p:pic>
+        <p:nvPicPr>
+          <p:cNvPr id="8" name="Picture 6"/>
+          <p:cNvPicPr>
+            <a:picLocks noChangeAspect="1"/>
+          </p:cNvPicPr>
+          <p:nvPr/>
+        </p:nvPicPr>
+        <p:blipFill rotWithShape="1">
+          <a:blip r:embed="rId3"/>
+          <a:stretch>
+            <a:fillRect/>
+          </a:stretch>
+        </p:blipFill>
+        <p:spPr>
+          <a:xfrm>
+            <a:off x="20828000" y="12369800"/>
+            <a:ext cx="2540000" cy="304800"/>
+          </a:xfrm>
+          <a:prstGeom prst="rect">
+            <a:avLst/>
+          </a:prstGeom>
+        </p:spPr>
+      </p:pic>
+      <p:pic>
+        <p:nvPicPr>
+          <p:cNvPr id="9" name="Picture 8"/>
+          <p:cNvPicPr>
+            <a:picLocks noChangeAspect="1"/>
+          </p:cNvPicPr>
+          <p:nvPr/>
+        </p:nvPicPr>
+        <p:blipFill rotWithShape="1">
+          <a:blip r:embed="rId2"/>
+          <a:stretch>
+            <a:fillRect/>
+          </a:stretch>
+        </p:blipFill>
+        <p:spPr>
+          <a:xfrm flipV="1">
+            <a:off x="1045570" y="2059190"/>
+            <a:ext cx="21814430" cy="45719"/>
+          </a:xfrm>
+          <a:prstGeom prst="rect">
+            <a:avLst/>
+          </a:prstGeom>
+        </p:spPr>
+      </p:pic>
+      <p:pic>
+        <p:nvPicPr>
+          <p:cNvPr id="10" name="Picture 7"/>
+          <p:cNvPicPr>
+            <a:picLocks noChangeAspect="1"/>
+          </p:cNvPicPr>
+          <p:nvPr/>
+        </p:nvPicPr>
+        <p:blipFill rotWithShape="1">
+          <a:blip r:embed="rId4"/>
+          <a:stretch>
+            <a:fillRect/>
+          </a:stretch>
+        </p:blipFill>
+        <p:spPr>
+          <a:xfrm rot="16200000">
+            <a:off x="20523200" y="12369800"/>
+            <a:ext cx="304800" cy="304800"/>
+          </a:xfrm>
+          <a:prstGeom prst="rect">
+            <a:avLst/>
+          </a:prstGeom>
+        </p:spPr>
+      </p:pic>
+      <p:sp>
+        <p:nvSpPr>
+          <p:cNvPr id="13" name="TextBox 10"/>
+          <p:cNvSpPr txBox="1"/>
+          <p:nvPr/>
+        </p:nvSpPr>
+        <p:spPr>
+          <a:xfrm>
+            <a:off x="1295400" y="609600"/>
+            <a:ext cx="11125200" cy="1181100"/>
+          </a:xfrm>
+          <a:prstGeom prst="rect">
+            <a:avLst/>
+          </a:prstGeom>
+        </p:spPr>
+        <p:txBody>
+          <a:bodyPr lIns="0" tIns="0" rIns="0" bIns="0" anchor="t"/>
+          <a:lstStyle/>
+          <a:p>
+            <a:pPr lvl="0">
+              <a:lnSpc>
+                <a:spcPct val="116199"/>
+              </a:lnSpc>
+              <a:defRPr/>
+            </a:pPr>
+            <a:r>
+              <a:rPr lang="en-US" altLang="ko-KR" sz="9600" b="1" dirty="0">
+                <a:solidFill>
+                  <a:srgbClr val="000000"/>
+                </a:solidFill>
+                <a:latin typeface="Pretendard Bold"/>
+                <a:ea typeface="Pretendard Bold"/>
+                <a:cs typeface="Pretendard Bold"/>
+              </a:rPr>
+              <a:t>TX + </a:t>
+            </a:r>
+            <a:r>
+              <a:rPr lang="en-US" altLang="ko-KR" sz="9600" b="1" dirty="0" smtClean="0">
+                <a:solidFill>
+                  <a:srgbClr val="000000"/>
+                </a:solidFill>
+                <a:latin typeface="Pretendard Bold"/>
+                <a:ea typeface="Pretendard Bold"/>
+                <a:cs typeface="Pretendard Bold"/>
+              </a:rPr>
+              <a:t>FIFO</a:t>
+            </a:r>
+            <a:endParaRPr lang="ko-KR" altLang="en-US" sz="9600" b="1" dirty="0">
+              <a:solidFill>
+                <a:srgbClr val="000000"/>
+              </a:solidFill>
+              <a:latin typeface="Pretendard Bold"/>
+              <a:ea typeface="Pretendard Bold"/>
+              <a:cs typeface="Pretendard Bold"/>
+            </a:endParaRPr>
+          </a:p>
+        </p:txBody>
+      </p:sp>
+      <p:pic>
+        <p:nvPicPr>
+          <p:cNvPr id="3" name="Picture 6"/>
+          <p:cNvPicPr>
+            <a:picLocks noChangeAspect="1"/>
+          </p:cNvPicPr>
+          <p:nvPr/>
+        </p:nvPicPr>
+        <p:blipFill rotWithShape="1">
+          <a:blip r:embed="rId3"/>
+          <a:stretch>
+            <a:fillRect/>
+          </a:stretch>
+        </p:blipFill>
+        <p:spPr>
+          <a:xfrm>
+            <a:off x="20828000" y="12369800"/>
+            <a:ext cx="2540000" cy="304800"/>
+          </a:xfrm>
+          <a:prstGeom prst="rect">
+            <a:avLst/>
+          </a:prstGeom>
+        </p:spPr>
+      </p:pic>
+      <p:pic>
+        <p:nvPicPr>
+          <p:cNvPr id="4" name="Picture 7"/>
+          <p:cNvPicPr>
+            <a:picLocks noChangeAspect="1"/>
+          </p:cNvPicPr>
+          <p:nvPr/>
+        </p:nvPicPr>
+        <p:blipFill rotWithShape="1">
+          <a:blip r:embed="rId4"/>
+          <a:stretch>
+            <a:fillRect/>
+          </a:stretch>
+        </p:blipFill>
+        <p:spPr>
+          <a:xfrm rot="16200000">
+            <a:off x="20523200" y="12369800"/>
+            <a:ext cx="304800" cy="304800"/>
+          </a:xfrm>
+          <a:prstGeom prst="rect">
+            <a:avLst/>
+          </a:prstGeom>
+        </p:spPr>
+      </p:pic>
+      <p:sp>
+        <p:nvSpPr>
+          <p:cNvPr id="5" name="TextBox 4"/>
+          <p:cNvSpPr txBox="1"/>
+          <p:nvPr/>
+        </p:nvSpPr>
+        <p:spPr>
+          <a:xfrm>
+            <a:off x="1295400" y="2144799"/>
+            <a:ext cx="11430000" cy="923330"/>
+          </a:xfrm>
+          <a:prstGeom prst="rect">
+            <a:avLst/>
+          </a:prstGeom>
+          <a:noFill/>
+        </p:spPr>
+        <p:txBody>
+          <a:bodyPr wrap="square">
+            <a:spAutoFit/>
+          </a:bodyPr>
+          <a:lstStyle/>
+          <a:p>
+            <a:pPr lvl="0">
+              <a:defRPr/>
+            </a:pPr>
+            <a:r>
+              <a:rPr lang="en-US" altLang="ko-KR" sz="5400" b="1"/>
+              <a:t>- Verification(random </a:t>
+            </a:r>
+            <a:r>
+              <a:rPr lang="en-US" altLang="ko-KR" sz="5400" b="1">
+                <a:sym typeface="Wingdings"/>
+              </a:rPr>
+              <a:t>1000 cycle</a:t>
+            </a:r>
+            <a:r>
+              <a:rPr lang="en-US" altLang="ko-KR" sz="5400" b="1"/>
+              <a:t>)</a:t>
+            </a:r>
+          </a:p>
+        </p:txBody>
+      </p:sp>
       <p:sp>
         <p:nvSpPr>
           <p:cNvPr id="22" name="TextBox 21"/>
@@ -42365,7 +43386,781 @@
 </p:sld>
 </file>
 
-<file path=ppt/slides/slide73.xml><?xml version="1.0" encoding="utf-8"?>
+<file path=ppt/slides/slide74.xml><?xml version="1.0" encoding="utf-8"?>
+<p:sld xmlns:a="http://schemas.openxmlformats.org/drawingml/2006/main" xmlns:r="http://schemas.openxmlformats.org/officeDocument/2006/relationships" xmlns:p="http://schemas.openxmlformats.org/presentationml/2006/main">
+  <p:cSld>
+    <p:spTree>
+      <p:nvGrpSpPr>
+        <p:cNvPr id="1" name=""/>
+        <p:cNvGrpSpPr/>
+        <p:nvPr/>
+      </p:nvGrpSpPr>
+      <p:grpSpPr>
+        <a:xfrm>
+          <a:off x="0" y="0"/>
+          <a:ext cx="0" cy="0"/>
+          <a:chOff x="0" y="0"/>
+          <a:chExt cx="0" cy="0"/>
+        </a:xfrm>
+      </p:grpSpPr>
+      <p:pic>
+        <p:nvPicPr>
+          <p:cNvPr id="2" name="Picture 8"/>
+          <p:cNvPicPr>
+            <a:picLocks noChangeAspect="1"/>
+          </p:cNvPicPr>
+          <p:nvPr/>
+        </p:nvPicPr>
+        <p:blipFill rotWithShape="1">
+          <a:blip r:embed="rId2"/>
+          <a:stretch>
+            <a:fillRect/>
+          </a:stretch>
+        </p:blipFill>
+        <p:spPr>
+          <a:xfrm>
+            <a:off x="1016000" y="12674600"/>
+            <a:ext cx="22352000" cy="25400"/>
+          </a:xfrm>
+          <a:prstGeom prst="rect">
+            <a:avLst/>
+          </a:prstGeom>
+        </p:spPr>
+      </p:pic>
+      <p:sp>
+        <p:nvSpPr>
+          <p:cNvPr id="7" name="TextBox 10"/>
+          <p:cNvSpPr txBox="1"/>
+          <p:nvPr/>
+        </p:nvSpPr>
+        <p:spPr>
+          <a:xfrm>
+            <a:off x="1096370" y="838200"/>
+            <a:ext cx="3606800" cy="1181100"/>
+          </a:xfrm>
+          <a:prstGeom prst="rect">
+            <a:avLst/>
+          </a:prstGeom>
+        </p:spPr>
+        <p:txBody>
+          <a:bodyPr lIns="0" tIns="0" rIns="0" bIns="0" anchor="t"/>
+          <a:lstStyle/>
+          <a:p>
+            <a:pPr lvl="0" algn="l">
+              <a:lnSpc>
+                <a:spcPct val="116199"/>
+              </a:lnSpc>
+              <a:defRPr/>
+            </a:pPr>
+            <a:endParaRPr lang="ko-KR" altLang="en-US" sz="6666" b="0" i="0" u="none" strike="noStrike">
+              <a:solidFill>
+                <a:srgbClr val="000000"/>
+              </a:solidFill>
+              <a:latin typeface="Pretendard Bold"/>
+              <a:ea typeface="Pretendard Bold"/>
+              <a:cs typeface="Pretendard Bold"/>
+            </a:endParaRPr>
+          </a:p>
+        </p:txBody>
+      </p:sp>
+      <p:pic>
+        <p:nvPicPr>
+          <p:cNvPr id="8" name="Picture 6"/>
+          <p:cNvPicPr>
+            <a:picLocks noChangeAspect="1"/>
+          </p:cNvPicPr>
+          <p:nvPr/>
+        </p:nvPicPr>
+        <p:blipFill rotWithShape="1">
+          <a:blip r:embed="rId3"/>
+          <a:stretch>
+            <a:fillRect/>
+          </a:stretch>
+        </p:blipFill>
+        <p:spPr>
+          <a:xfrm>
+            <a:off x="20828000" y="12369800"/>
+            <a:ext cx="2540000" cy="304800"/>
+          </a:xfrm>
+          <a:prstGeom prst="rect">
+            <a:avLst/>
+          </a:prstGeom>
+        </p:spPr>
+      </p:pic>
+      <p:pic>
+        <p:nvPicPr>
+          <p:cNvPr id="9" name="Picture 8"/>
+          <p:cNvPicPr>
+            <a:picLocks noChangeAspect="1"/>
+          </p:cNvPicPr>
+          <p:nvPr/>
+        </p:nvPicPr>
+        <p:blipFill rotWithShape="1">
+          <a:blip r:embed="rId2"/>
+          <a:stretch>
+            <a:fillRect/>
+          </a:stretch>
+        </p:blipFill>
+        <p:spPr>
+          <a:xfrm flipV="1">
+            <a:off x="1045570" y="2059190"/>
+            <a:ext cx="21814430" cy="45719"/>
+          </a:xfrm>
+          <a:prstGeom prst="rect">
+            <a:avLst/>
+          </a:prstGeom>
+        </p:spPr>
+      </p:pic>
+      <p:pic>
+        <p:nvPicPr>
+          <p:cNvPr id="10" name="Picture 7"/>
+          <p:cNvPicPr>
+            <a:picLocks noChangeAspect="1"/>
+          </p:cNvPicPr>
+          <p:nvPr/>
+        </p:nvPicPr>
+        <p:blipFill rotWithShape="1">
+          <a:blip r:embed="rId4"/>
+          <a:stretch>
+            <a:fillRect/>
+          </a:stretch>
+        </p:blipFill>
+        <p:spPr>
+          <a:xfrm rot="16200000">
+            <a:off x="20523200" y="12369800"/>
+            <a:ext cx="304800" cy="304800"/>
+          </a:xfrm>
+          <a:prstGeom prst="rect">
+            <a:avLst/>
+          </a:prstGeom>
+        </p:spPr>
+      </p:pic>
+      <p:sp>
+        <p:nvSpPr>
+          <p:cNvPr id="13" name="TextBox 10"/>
+          <p:cNvSpPr txBox="1"/>
+          <p:nvPr/>
+        </p:nvSpPr>
+        <p:spPr>
+          <a:xfrm>
+            <a:off x="1295400" y="609600"/>
+            <a:ext cx="11125200" cy="1181100"/>
+          </a:xfrm>
+          <a:prstGeom prst="rect">
+            <a:avLst/>
+          </a:prstGeom>
+        </p:spPr>
+        <p:txBody>
+          <a:bodyPr lIns="0" tIns="0" rIns="0" bIns="0" anchor="t"/>
+          <a:lstStyle/>
+          <a:p>
+            <a:pPr lvl="0">
+              <a:lnSpc>
+                <a:spcPct val="116199"/>
+              </a:lnSpc>
+              <a:defRPr/>
+            </a:pPr>
+            <a:r>
+              <a:rPr lang="en-US" altLang="ko-KR" sz="9600" b="1" dirty="0">
+                <a:solidFill>
+                  <a:srgbClr val="000000"/>
+                </a:solidFill>
+                <a:latin typeface="Pretendard Bold"/>
+                <a:ea typeface="Pretendard Bold"/>
+                <a:cs typeface="Pretendard Bold"/>
+              </a:rPr>
+              <a:t>TX + </a:t>
+            </a:r>
+            <a:r>
+              <a:rPr lang="en-US" altLang="ko-KR" sz="9600" b="1" dirty="0" smtClean="0">
+                <a:solidFill>
+                  <a:srgbClr val="000000"/>
+                </a:solidFill>
+                <a:latin typeface="Pretendard Bold"/>
+                <a:ea typeface="Pretendard Bold"/>
+                <a:cs typeface="Pretendard Bold"/>
+              </a:rPr>
+              <a:t>FIFO</a:t>
+            </a:r>
+            <a:endParaRPr lang="ko-KR" altLang="en-US" sz="9600" b="1" dirty="0">
+              <a:solidFill>
+                <a:srgbClr val="000000"/>
+              </a:solidFill>
+              <a:latin typeface="Pretendard Bold"/>
+              <a:ea typeface="Pretendard Bold"/>
+              <a:cs typeface="Pretendard Bold"/>
+            </a:endParaRPr>
+          </a:p>
+        </p:txBody>
+      </p:sp>
+      <p:pic>
+        <p:nvPicPr>
+          <p:cNvPr id="3" name="Picture 6"/>
+          <p:cNvPicPr>
+            <a:picLocks noChangeAspect="1"/>
+          </p:cNvPicPr>
+          <p:nvPr/>
+        </p:nvPicPr>
+        <p:blipFill rotWithShape="1">
+          <a:blip r:embed="rId3"/>
+          <a:stretch>
+            <a:fillRect/>
+          </a:stretch>
+        </p:blipFill>
+        <p:spPr>
+          <a:xfrm>
+            <a:off x="20828000" y="12369800"/>
+            <a:ext cx="2540000" cy="304800"/>
+          </a:xfrm>
+          <a:prstGeom prst="rect">
+            <a:avLst/>
+          </a:prstGeom>
+        </p:spPr>
+      </p:pic>
+      <p:pic>
+        <p:nvPicPr>
+          <p:cNvPr id="4" name="Picture 7"/>
+          <p:cNvPicPr>
+            <a:picLocks noChangeAspect="1"/>
+          </p:cNvPicPr>
+          <p:nvPr/>
+        </p:nvPicPr>
+        <p:blipFill rotWithShape="1">
+          <a:blip r:embed="rId4"/>
+          <a:stretch>
+            <a:fillRect/>
+          </a:stretch>
+        </p:blipFill>
+        <p:spPr>
+          <a:xfrm rot="16200000">
+            <a:off x="20523200" y="12369800"/>
+            <a:ext cx="304800" cy="304800"/>
+          </a:xfrm>
+          <a:prstGeom prst="rect">
+            <a:avLst/>
+          </a:prstGeom>
+        </p:spPr>
+      </p:pic>
+      <p:sp>
+        <p:nvSpPr>
+          <p:cNvPr id="5" name="TextBox 4"/>
+          <p:cNvSpPr txBox="1"/>
+          <p:nvPr/>
+        </p:nvSpPr>
+        <p:spPr>
+          <a:xfrm>
+            <a:off x="1295400" y="2144799"/>
+            <a:ext cx="13639800" cy="923330"/>
+          </a:xfrm>
+          <a:prstGeom prst="rect">
+            <a:avLst/>
+          </a:prstGeom>
+          <a:noFill/>
+        </p:spPr>
+        <p:txBody>
+          <a:bodyPr wrap="square">
+            <a:spAutoFit/>
+          </a:bodyPr>
+          <a:lstStyle/>
+          <a:p>
+            <a:pPr lvl="0">
+              <a:defRPr/>
+            </a:pPr>
+            <a:r>
+              <a:rPr lang="en-US" altLang="ko-KR" sz="5400" b="1" dirty="0"/>
+              <a:t>- </a:t>
+            </a:r>
+            <a:r>
+              <a:rPr lang="en-US" altLang="ko-KR" sz="5400" b="1" dirty="0" smtClean="0"/>
+              <a:t>Verification(</a:t>
+            </a:r>
+            <a:r>
+              <a:rPr lang="en-US" altLang="ko-KR" sz="5400" b="1" dirty="0" err="1" smtClean="0"/>
+              <a:t>fifo</a:t>
+            </a:r>
+            <a:r>
+              <a:rPr lang="en-US" altLang="ko-KR" sz="5400" b="1" dirty="0"/>
+              <a:t>[</a:t>
+            </a:r>
+            <a:r>
+              <a:rPr lang="en-US" altLang="ko-KR" sz="5400" b="1" dirty="0" smtClean="0"/>
+              <a:t>full] -&gt; </a:t>
+            </a:r>
+            <a:r>
+              <a:rPr lang="en-US" altLang="ko-KR" sz="5400" b="1" dirty="0" smtClean="0">
+                <a:solidFill>
+                  <a:srgbClr val="000000"/>
+                </a:solidFill>
+                <a:latin typeface="noto"/>
+              </a:rPr>
+              <a:t>continuous </a:t>
+            </a:r>
+            <a:r>
+              <a:rPr lang="en-US" altLang="ko-KR" sz="5400" b="1" dirty="0">
+                <a:solidFill>
+                  <a:srgbClr val="000000"/>
+                </a:solidFill>
+                <a:latin typeface="noto"/>
+              </a:rPr>
+              <a:t>output</a:t>
+            </a:r>
+            <a:r>
+              <a:rPr lang="en-US" altLang="ko-KR" sz="5400" b="1" dirty="0" smtClean="0"/>
+              <a:t>)</a:t>
+            </a:r>
+            <a:endParaRPr lang="en-US" altLang="ko-KR" sz="5400" b="1" dirty="0"/>
+          </a:p>
+        </p:txBody>
+      </p:sp>
+      <p:pic>
+        <p:nvPicPr>
+          <p:cNvPr id="6" name="그림 5"/>
+          <p:cNvPicPr>
+            <a:picLocks noChangeAspect="1"/>
+          </p:cNvPicPr>
+          <p:nvPr/>
+        </p:nvPicPr>
+        <p:blipFill>
+          <a:blip r:embed="rId5"/>
+          <a:stretch>
+            <a:fillRect/>
+          </a:stretch>
+        </p:blipFill>
+        <p:spPr>
+          <a:xfrm>
+            <a:off x="152400" y="3182762"/>
+            <a:ext cx="6980475" cy="9219989"/>
+          </a:xfrm>
+          <a:prstGeom prst="rect">
+            <a:avLst/>
+          </a:prstGeom>
+        </p:spPr>
+      </p:pic>
+      <p:pic>
+        <p:nvPicPr>
+          <p:cNvPr id="11" name="그림 10"/>
+          <p:cNvPicPr>
+            <a:picLocks noChangeAspect="1"/>
+          </p:cNvPicPr>
+          <p:nvPr/>
+        </p:nvPicPr>
+        <p:blipFill>
+          <a:blip r:embed="rId6"/>
+          <a:stretch>
+            <a:fillRect/>
+          </a:stretch>
+        </p:blipFill>
+        <p:spPr>
+          <a:xfrm>
+            <a:off x="7467600" y="3068128"/>
+            <a:ext cx="16436546" cy="8643251"/>
+          </a:xfrm>
+          <a:prstGeom prst="rect">
+            <a:avLst/>
+          </a:prstGeom>
+        </p:spPr>
+      </p:pic>
+    </p:spTree>
+    <p:extLst>
+      <p:ext uri="{BB962C8B-B14F-4D97-AF65-F5344CB8AC3E}">
+        <p14:creationId xmlns:p14="http://schemas.microsoft.com/office/powerpoint/2010/main" val="3604380406"/>
+      </p:ext>
+    </p:extLst>
+  </p:cSld>
+  <p:clrMapOvr>
+    <a:masterClrMapping/>
+  </p:clrMapOvr>
+</p:sld>
+</file>
+
+<file path=ppt/slides/slide75.xml><?xml version="1.0" encoding="utf-8"?>
+<p:sld xmlns:a="http://schemas.openxmlformats.org/drawingml/2006/main" xmlns:r="http://schemas.openxmlformats.org/officeDocument/2006/relationships" xmlns:p="http://schemas.openxmlformats.org/presentationml/2006/main">
+  <p:cSld>
+    <p:spTree>
+      <p:nvGrpSpPr>
+        <p:cNvPr id="1" name=""/>
+        <p:cNvGrpSpPr/>
+        <p:nvPr/>
+      </p:nvGrpSpPr>
+      <p:grpSpPr>
+        <a:xfrm>
+          <a:off x="0" y="0"/>
+          <a:ext cx="0" cy="0"/>
+          <a:chOff x="0" y="0"/>
+          <a:chExt cx="0" cy="0"/>
+        </a:xfrm>
+      </p:grpSpPr>
+      <p:pic>
+        <p:nvPicPr>
+          <p:cNvPr id="2" name="Picture 8"/>
+          <p:cNvPicPr>
+            <a:picLocks noChangeAspect="1"/>
+          </p:cNvPicPr>
+          <p:nvPr/>
+        </p:nvPicPr>
+        <p:blipFill rotWithShape="1">
+          <a:blip r:embed="rId2"/>
+          <a:stretch>
+            <a:fillRect/>
+          </a:stretch>
+        </p:blipFill>
+        <p:spPr>
+          <a:xfrm>
+            <a:off x="1016000" y="12674600"/>
+            <a:ext cx="22352000" cy="25400"/>
+          </a:xfrm>
+          <a:prstGeom prst="rect">
+            <a:avLst/>
+          </a:prstGeom>
+        </p:spPr>
+      </p:pic>
+      <p:sp>
+        <p:nvSpPr>
+          <p:cNvPr id="7" name="TextBox 10"/>
+          <p:cNvSpPr txBox="1"/>
+          <p:nvPr/>
+        </p:nvSpPr>
+        <p:spPr>
+          <a:xfrm>
+            <a:off x="1096370" y="838200"/>
+            <a:ext cx="3606800" cy="1181100"/>
+          </a:xfrm>
+          <a:prstGeom prst="rect">
+            <a:avLst/>
+          </a:prstGeom>
+        </p:spPr>
+        <p:txBody>
+          <a:bodyPr lIns="0" tIns="0" rIns="0" bIns="0" anchor="t"/>
+          <a:lstStyle/>
+          <a:p>
+            <a:pPr lvl="0" algn="l">
+              <a:lnSpc>
+                <a:spcPct val="116199"/>
+              </a:lnSpc>
+              <a:defRPr/>
+            </a:pPr>
+            <a:endParaRPr lang="ko-KR" altLang="en-US" sz="6666" b="0" i="0" u="none" strike="noStrike">
+              <a:solidFill>
+                <a:srgbClr val="000000"/>
+              </a:solidFill>
+              <a:latin typeface="Pretendard Bold"/>
+              <a:ea typeface="Pretendard Bold"/>
+              <a:cs typeface="Pretendard Bold"/>
+            </a:endParaRPr>
+          </a:p>
+        </p:txBody>
+      </p:sp>
+      <p:pic>
+        <p:nvPicPr>
+          <p:cNvPr id="8" name="Picture 6"/>
+          <p:cNvPicPr>
+            <a:picLocks noChangeAspect="1"/>
+          </p:cNvPicPr>
+          <p:nvPr/>
+        </p:nvPicPr>
+        <p:blipFill rotWithShape="1">
+          <a:blip r:embed="rId3"/>
+          <a:stretch>
+            <a:fillRect/>
+          </a:stretch>
+        </p:blipFill>
+        <p:spPr>
+          <a:xfrm>
+            <a:off x="20828000" y="12369800"/>
+            <a:ext cx="2540000" cy="304800"/>
+          </a:xfrm>
+          <a:prstGeom prst="rect">
+            <a:avLst/>
+          </a:prstGeom>
+        </p:spPr>
+      </p:pic>
+      <p:pic>
+        <p:nvPicPr>
+          <p:cNvPr id="9" name="Picture 8"/>
+          <p:cNvPicPr>
+            <a:picLocks noChangeAspect="1"/>
+          </p:cNvPicPr>
+          <p:nvPr/>
+        </p:nvPicPr>
+        <p:blipFill rotWithShape="1">
+          <a:blip r:embed="rId2"/>
+          <a:stretch>
+            <a:fillRect/>
+          </a:stretch>
+        </p:blipFill>
+        <p:spPr>
+          <a:xfrm flipV="1">
+            <a:off x="1045570" y="2059190"/>
+            <a:ext cx="21814430" cy="45719"/>
+          </a:xfrm>
+          <a:prstGeom prst="rect">
+            <a:avLst/>
+          </a:prstGeom>
+        </p:spPr>
+      </p:pic>
+      <p:pic>
+        <p:nvPicPr>
+          <p:cNvPr id="10" name="Picture 7"/>
+          <p:cNvPicPr>
+            <a:picLocks noChangeAspect="1"/>
+          </p:cNvPicPr>
+          <p:nvPr/>
+        </p:nvPicPr>
+        <p:blipFill rotWithShape="1">
+          <a:blip r:embed="rId4"/>
+          <a:stretch>
+            <a:fillRect/>
+          </a:stretch>
+        </p:blipFill>
+        <p:spPr>
+          <a:xfrm rot="16200000">
+            <a:off x="20523200" y="12369800"/>
+            <a:ext cx="304800" cy="304800"/>
+          </a:xfrm>
+          <a:prstGeom prst="rect">
+            <a:avLst/>
+          </a:prstGeom>
+        </p:spPr>
+      </p:pic>
+      <p:sp>
+        <p:nvSpPr>
+          <p:cNvPr id="13" name="TextBox 10"/>
+          <p:cNvSpPr txBox="1"/>
+          <p:nvPr/>
+        </p:nvSpPr>
+        <p:spPr>
+          <a:xfrm>
+            <a:off x="1295400" y="609600"/>
+            <a:ext cx="11125200" cy="1181100"/>
+          </a:xfrm>
+          <a:prstGeom prst="rect">
+            <a:avLst/>
+          </a:prstGeom>
+        </p:spPr>
+        <p:txBody>
+          <a:bodyPr lIns="0" tIns="0" rIns="0" bIns="0" anchor="t"/>
+          <a:lstStyle/>
+          <a:p>
+            <a:pPr lvl="0">
+              <a:lnSpc>
+                <a:spcPct val="116199"/>
+              </a:lnSpc>
+              <a:defRPr/>
+            </a:pPr>
+            <a:r>
+              <a:rPr lang="en-US" altLang="ko-KR" sz="9600" b="1" dirty="0">
+                <a:solidFill>
+                  <a:srgbClr val="000000"/>
+                </a:solidFill>
+                <a:latin typeface="Pretendard Bold"/>
+                <a:ea typeface="Pretendard Bold"/>
+                <a:cs typeface="Pretendard Bold"/>
+              </a:rPr>
+              <a:t>TX + </a:t>
+            </a:r>
+            <a:r>
+              <a:rPr lang="en-US" altLang="ko-KR" sz="9600" b="1" dirty="0" smtClean="0">
+                <a:solidFill>
+                  <a:srgbClr val="000000"/>
+                </a:solidFill>
+                <a:latin typeface="Pretendard Bold"/>
+                <a:ea typeface="Pretendard Bold"/>
+                <a:cs typeface="Pretendard Bold"/>
+              </a:rPr>
+              <a:t>FIFO</a:t>
+            </a:r>
+            <a:endParaRPr lang="ko-KR" altLang="en-US" sz="9600" b="1" dirty="0">
+              <a:solidFill>
+                <a:srgbClr val="000000"/>
+              </a:solidFill>
+              <a:latin typeface="Pretendard Bold"/>
+              <a:ea typeface="Pretendard Bold"/>
+              <a:cs typeface="Pretendard Bold"/>
+            </a:endParaRPr>
+          </a:p>
+        </p:txBody>
+      </p:sp>
+      <p:pic>
+        <p:nvPicPr>
+          <p:cNvPr id="3" name="Picture 6"/>
+          <p:cNvPicPr>
+            <a:picLocks noChangeAspect="1"/>
+          </p:cNvPicPr>
+          <p:nvPr/>
+        </p:nvPicPr>
+        <p:blipFill rotWithShape="1">
+          <a:blip r:embed="rId3"/>
+          <a:stretch>
+            <a:fillRect/>
+          </a:stretch>
+        </p:blipFill>
+        <p:spPr>
+          <a:xfrm>
+            <a:off x="20828000" y="12369800"/>
+            <a:ext cx="2540000" cy="304800"/>
+          </a:xfrm>
+          <a:prstGeom prst="rect">
+            <a:avLst/>
+          </a:prstGeom>
+        </p:spPr>
+      </p:pic>
+      <p:pic>
+        <p:nvPicPr>
+          <p:cNvPr id="4" name="Picture 7"/>
+          <p:cNvPicPr>
+            <a:picLocks noChangeAspect="1"/>
+          </p:cNvPicPr>
+          <p:nvPr/>
+        </p:nvPicPr>
+        <p:blipFill rotWithShape="1">
+          <a:blip r:embed="rId4"/>
+          <a:stretch>
+            <a:fillRect/>
+          </a:stretch>
+        </p:blipFill>
+        <p:spPr>
+          <a:xfrm rot="16200000">
+            <a:off x="20523200" y="12369800"/>
+            <a:ext cx="304800" cy="304800"/>
+          </a:xfrm>
+          <a:prstGeom prst="rect">
+            <a:avLst/>
+          </a:prstGeom>
+        </p:spPr>
+      </p:pic>
+      <p:sp>
+        <p:nvSpPr>
+          <p:cNvPr id="5" name="TextBox 4"/>
+          <p:cNvSpPr txBox="1"/>
+          <p:nvPr/>
+        </p:nvSpPr>
+        <p:spPr>
+          <a:xfrm>
+            <a:off x="1295400" y="2144799"/>
+            <a:ext cx="13639800" cy="923330"/>
+          </a:xfrm>
+          <a:prstGeom prst="rect">
+            <a:avLst/>
+          </a:prstGeom>
+          <a:noFill/>
+        </p:spPr>
+        <p:txBody>
+          <a:bodyPr wrap="square">
+            <a:spAutoFit/>
+          </a:bodyPr>
+          <a:lstStyle/>
+          <a:p>
+            <a:pPr lvl="0">
+              <a:defRPr/>
+            </a:pPr>
+            <a:r>
+              <a:rPr lang="en-US" altLang="ko-KR" sz="5400" b="1" dirty="0"/>
+              <a:t>- </a:t>
+            </a:r>
+            <a:r>
+              <a:rPr lang="en-US" altLang="ko-KR" sz="5400" b="1" dirty="0" smtClean="0"/>
+              <a:t>Verification(</a:t>
+            </a:r>
+            <a:r>
+              <a:rPr lang="en-US" altLang="ko-KR" sz="5400" b="1" dirty="0" err="1" smtClean="0"/>
+              <a:t>fifo</a:t>
+            </a:r>
+            <a:r>
+              <a:rPr lang="en-US" altLang="ko-KR" sz="5400" b="1" dirty="0"/>
+              <a:t>[</a:t>
+            </a:r>
+            <a:r>
+              <a:rPr lang="en-US" altLang="ko-KR" sz="5400" b="1" dirty="0" smtClean="0"/>
+              <a:t>full] -&gt; </a:t>
+            </a:r>
+            <a:r>
+              <a:rPr lang="en-US" altLang="ko-KR" sz="5400" b="1" dirty="0" smtClean="0">
+                <a:solidFill>
+                  <a:srgbClr val="000000"/>
+                </a:solidFill>
+                <a:latin typeface="noto"/>
+              </a:rPr>
+              <a:t>continuous </a:t>
+            </a:r>
+            <a:r>
+              <a:rPr lang="en-US" altLang="ko-KR" sz="5400" b="1" dirty="0">
+                <a:solidFill>
+                  <a:srgbClr val="000000"/>
+                </a:solidFill>
+                <a:latin typeface="noto"/>
+              </a:rPr>
+              <a:t>output</a:t>
+            </a:r>
+            <a:r>
+              <a:rPr lang="en-US" altLang="ko-KR" sz="5400" b="1" dirty="0" smtClean="0"/>
+              <a:t>)</a:t>
+            </a:r>
+            <a:endParaRPr lang="en-US" altLang="ko-KR" sz="5400" b="1" dirty="0"/>
+          </a:p>
+        </p:txBody>
+      </p:sp>
+      <p:pic>
+        <p:nvPicPr>
+          <p:cNvPr id="6" name="그림 5"/>
+          <p:cNvPicPr>
+            <a:picLocks noChangeAspect="1"/>
+          </p:cNvPicPr>
+          <p:nvPr/>
+        </p:nvPicPr>
+        <p:blipFill>
+          <a:blip r:embed="rId5"/>
+          <a:stretch>
+            <a:fillRect/>
+          </a:stretch>
+        </p:blipFill>
+        <p:spPr>
+          <a:xfrm>
+            <a:off x="1447800" y="3249013"/>
+            <a:ext cx="6980475" cy="9219989"/>
+          </a:xfrm>
+          <a:prstGeom prst="rect">
+            <a:avLst/>
+          </a:prstGeom>
+        </p:spPr>
+      </p:pic>
+      <p:pic>
+        <p:nvPicPr>
+          <p:cNvPr id="12" name="그림 11"/>
+          <p:cNvPicPr>
+            <a:picLocks noChangeAspect="1"/>
+          </p:cNvPicPr>
+          <p:nvPr/>
+        </p:nvPicPr>
+        <p:blipFill>
+          <a:blip r:embed="rId6"/>
+          <a:stretch>
+            <a:fillRect/>
+          </a:stretch>
+        </p:blipFill>
+        <p:spPr>
+          <a:xfrm>
+            <a:off x="10893291" y="3991359"/>
+            <a:ext cx="9782309" cy="7088628"/>
+          </a:xfrm>
+          <a:prstGeom prst="rect">
+            <a:avLst/>
+          </a:prstGeom>
+        </p:spPr>
+      </p:pic>
+    </p:spTree>
+    <p:extLst>
+      <p:ext uri="{BB962C8B-B14F-4D97-AF65-F5344CB8AC3E}">
+        <p14:creationId xmlns:p14="http://schemas.microsoft.com/office/powerpoint/2010/main" val="440039155"/>
+      </p:ext>
+    </p:extLst>
+  </p:cSld>
+  <p:clrMapOvr>
+    <a:masterClrMapping/>
+  </p:clrMapOvr>
+</p:sld>
+</file>
+
+<file path=ppt/slides/slide76.xml><?xml version="1.0" encoding="utf-8"?>
 <p:sld xmlns:a="http://schemas.openxmlformats.org/drawingml/2006/main" xmlns:r="http://schemas.openxmlformats.org/officeDocument/2006/relationships" xmlns:p="http://schemas.openxmlformats.org/presentationml/2006/main">
   <p:cSld>
     <p:spTree>
